--- a/Phishing atelier/Phishing_couleurs_apaisees_13.pptx
+++ b/Phishing atelier/Phishing_couleurs_apaisees_13.pptx
@@ -4436,7 +4436,7 @@
           <a:p>
             <a:fld id="{48A87A34-81AB-432B-8DAE-1953F412C126}" type="datetimeFigureOut">
               <a:rPr lang="en-US" smtClean="0"/>
-              <a:t>7/9/2026</a:t>
+              <a:t>9/8/2026</a:t>
             </a:fld>
             <a:endParaRPr lang="en-US" dirty="0"/>
           </a:p>
@@ -4704,7 +4704,7 @@
           <a:p>
             <a:fld id="{48A87A34-81AB-432B-8DAE-1953F412C126}" type="datetimeFigureOut">
               <a:rPr lang="en-US" smtClean="0"/>
-              <a:t>7/9/2026</a:t>
+              <a:t>9/8/2026</a:t>
             </a:fld>
             <a:endParaRPr lang="en-US" dirty="0"/>
           </a:p>
@@ -4936,7 +4936,7 @@
           <a:p>
             <a:fld id="{48A87A34-81AB-432B-8DAE-1953F412C126}" type="datetimeFigureOut">
               <a:rPr lang="en-US" smtClean="0"/>
-              <a:t>7/9/2026</a:t>
+              <a:t>9/8/2026</a:t>
             </a:fld>
             <a:endParaRPr lang="en-US" dirty="0"/>
           </a:p>
@@ -5247,7 +5247,7 @@
           <a:p>
             <a:fld id="{48A87A34-81AB-432B-8DAE-1953F412C126}" type="datetimeFigureOut">
               <a:rPr lang="en-US" smtClean="0"/>
-              <a:t>7/9/2026</a:t>
+              <a:t>9/8/2026</a:t>
             </a:fld>
             <a:endParaRPr lang="en-US" dirty="0"/>
           </a:p>
@@ -5721,7 +5721,7 @@
           <a:p>
             <a:fld id="{48A87A34-81AB-432B-8DAE-1953F412C126}" type="datetimeFigureOut">
               <a:rPr lang="en-US" smtClean="0"/>
-              <a:t>7/9/2026</a:t>
+              <a:t>9/8/2026</a:t>
             </a:fld>
             <a:endParaRPr lang="en-US" dirty="0"/>
           </a:p>
@@ -6269,7 +6269,7 @@
           <a:p>
             <a:fld id="{48A87A34-81AB-432B-8DAE-1953F412C126}" type="datetimeFigureOut">
               <a:rPr lang="en-US" smtClean="0"/>
-              <a:t>7/9/2026</a:t>
+              <a:t>9/8/2026</a:t>
             </a:fld>
             <a:endParaRPr lang="en-US" dirty="0"/>
           </a:p>
@@ -7044,7 +7044,7 @@
           <a:p>
             <a:fld id="{48A87A34-81AB-432B-8DAE-1953F412C126}" type="datetimeFigureOut">
               <a:rPr lang="en-US" smtClean="0"/>
-              <a:t>7/9/2026</a:t>
+              <a:t>9/8/2026</a:t>
             </a:fld>
             <a:endParaRPr lang="en-US" dirty="0"/>
           </a:p>
@@ -7221,7 +7221,7 @@
             <a:fld id="{48A87A34-81AB-432B-8DAE-1953F412C126}" type="datetimeFigureOut">
               <a:rPr lang="en-US" smtClean="0"/>
               <a:pPr/>
-              <a:t>7/9/2026</a:t>
+              <a:t>9/8/2026</a:t>
             </a:fld>
             <a:endParaRPr lang="en-US" dirty="0"/>
           </a:p>
@@ -7447,7 +7447,7 @@
             <a:fld id="{48A87A34-81AB-432B-8DAE-1953F412C126}" type="datetimeFigureOut">
               <a:rPr lang="en-US" smtClean="0"/>
               <a:pPr/>
-              <a:t>7/9/2026</a:t>
+              <a:t>9/8/2026</a:t>
             </a:fld>
             <a:endParaRPr lang="en-US" dirty="0"/>
           </a:p>
@@ -7695,7 +7695,7 @@
             <a:fld id="{48A87A34-81AB-432B-8DAE-1953F412C126}" type="datetimeFigureOut">
               <a:rPr lang="en-US" smtClean="0"/>
               <a:pPr/>
-              <a:t>7/9/2026</a:t>
+              <a:t>9/8/2026</a:t>
             </a:fld>
             <a:endParaRPr lang="en-US" dirty="0"/>
           </a:p>
@@ -7986,7 +7986,7 @@
           <a:p>
             <a:fld id="{48A87A34-81AB-432B-8DAE-1953F412C126}" type="datetimeFigureOut">
               <a:rPr lang="en-US" smtClean="0"/>
-              <a:t>7/9/2026</a:t>
+              <a:t>9/8/2026</a:t>
             </a:fld>
             <a:endParaRPr lang="en-US" dirty="0"/>
           </a:p>
@@ -8230,7 +8230,7 @@
             <a:fld id="{48A87A34-81AB-432B-8DAE-1953F412C126}" type="datetimeFigureOut">
               <a:rPr lang="en-US" smtClean="0"/>
               <a:pPr/>
-              <a:t>7/9/2026</a:t>
+              <a:t>9/8/2026</a:t>
             </a:fld>
             <a:endParaRPr lang="en-US" dirty="0"/>
           </a:p>
@@ -8612,7 +8612,7 @@
             <a:fld id="{48A87A34-81AB-432B-8DAE-1953F412C126}" type="datetimeFigureOut">
               <a:rPr lang="en-US" smtClean="0"/>
               <a:pPr/>
-              <a:t>7/9/2026</a:t>
+              <a:t>9/8/2026</a:t>
             </a:fld>
             <a:endParaRPr lang="en-US" dirty="0"/>
           </a:p>
@@ -8732,7 +8732,7 @@
           <a:p>
             <a:fld id="{48A87A34-81AB-432B-8DAE-1953F412C126}" type="datetimeFigureOut">
               <a:rPr lang="en-US" smtClean="0"/>
-              <a:t>7/9/2026</a:t>
+              <a:t>9/8/2026</a:t>
             </a:fld>
             <a:endParaRPr lang="en-US" dirty="0"/>
           </a:p>
@@ -8828,7 +8828,7 @@
           <a:p>
             <a:fld id="{48A87A34-81AB-432B-8DAE-1953F412C126}" type="datetimeFigureOut">
               <a:rPr lang="en-US" smtClean="0"/>
-              <a:t>7/9/2026</a:t>
+              <a:t>9/8/2026</a:t>
             </a:fld>
             <a:endParaRPr lang="en-US" dirty="0"/>
           </a:p>
@@ -9079,7 +9079,7 @@
             <a:fld id="{48A87A34-81AB-432B-8DAE-1953F412C126}" type="datetimeFigureOut">
               <a:rPr lang="en-US" smtClean="0"/>
               <a:pPr/>
-              <a:t>7/9/2026</a:t>
+              <a:t>9/8/2026</a:t>
             </a:fld>
             <a:endParaRPr lang="en-US" dirty="0"/>
           </a:p>
@@ -9338,7 +9338,7 @@
           <a:p>
             <a:fld id="{48A87A34-81AB-432B-8DAE-1953F412C126}" type="datetimeFigureOut">
               <a:rPr lang="en-US" smtClean="0"/>
-              <a:t>7/9/2026</a:t>
+              <a:t>9/8/2026</a:t>
             </a:fld>
             <a:endParaRPr lang="en-US" dirty="0"/>
           </a:p>
@@ -9583,7 +9583,7 @@
             <a:fld id="{48A87A34-81AB-432B-8DAE-1953F412C126}" type="datetimeFigureOut">
               <a:rPr lang="en-US" smtClean="0"/>
               <a:pPr/>
-              <a:t>7/9/2026</a:t>
+              <a:t>9/8/2026</a:t>
             </a:fld>
             <a:endParaRPr lang="en-US" dirty="0"/>
           </a:p>
@@ -11016,6 +11016,46 @@
           </a:p>
         </p:txBody>
       </p:sp>
+      <p:sp>
+        <p:nvSpPr>
+          <p:cNvPr id="29" name="ZoneTexte 28">
+            <a:extLst>
+              <a:ext uri="{FF2B5EF4-FFF2-40B4-BE49-F238E27FC236}">
+                <a16:creationId xmlns:a16="http://schemas.microsoft.com/office/drawing/2014/main" id="{F22E4AE1-D571-3E95-3D18-74A73849D80F}"/>
+              </a:ext>
+            </a:extLst>
+          </p:cNvPr>
+          <p:cNvSpPr txBox="1"/>
+          <p:nvPr/>
+        </p:nvSpPr>
+        <p:spPr>
+          <a:xfrm>
+            <a:off x="0" y="4864100"/>
+            <a:ext cx="9144000" cy="230832"/>
+          </a:xfrm>
+          <a:prstGeom prst="rect">
+            <a:avLst/>
+          </a:prstGeom>
+          <a:noFill/>
+        </p:spPr>
+        <p:txBody>
+          <a:bodyPr vert="horz" rtlCol="0">
+            <a:spAutoFit/>
+          </a:bodyPr>
+          <a:lstStyle/>
+          <a:p>
+            <a:pPr algn="ctr"/>
+            <a:r>
+              <a:rPr lang="fr-FR" sz="900">
+                <a:solidFill>
+                  <a:srgbClr val="B4B4B4"/>
+                </a:solidFill>
+              </a:rPr>
+              <a:t>(c) titi_23 - mediateur-numerique.github.io - Reproduction interdite sans autorisation</a:t>
+            </a:r>
+          </a:p>
+        </p:txBody>
+      </p:sp>
     </p:spTree>
   </p:cSld>
   <p:clrMapOvr>
@@ -12609,6 +12649,46 @@
           </a:prstGeom>
         </p:spPr>
       </p:pic>
+      <p:sp>
+        <p:nvSpPr>
+          <p:cNvPr id="36" name="ZoneTexte 35">
+            <a:extLst>
+              <a:ext uri="{FF2B5EF4-FFF2-40B4-BE49-F238E27FC236}">
+                <a16:creationId xmlns:a16="http://schemas.microsoft.com/office/drawing/2014/main" id="{B3579AC9-B1D7-A8BC-651B-460870E36EE9}"/>
+              </a:ext>
+            </a:extLst>
+          </p:cNvPr>
+          <p:cNvSpPr txBox="1"/>
+          <p:nvPr/>
+        </p:nvSpPr>
+        <p:spPr>
+          <a:xfrm>
+            <a:off x="0" y="4864100"/>
+            <a:ext cx="9144000" cy="230832"/>
+          </a:xfrm>
+          <a:prstGeom prst="rect">
+            <a:avLst/>
+          </a:prstGeom>
+          <a:noFill/>
+        </p:spPr>
+        <p:txBody>
+          <a:bodyPr vert="horz" rtlCol="0">
+            <a:spAutoFit/>
+          </a:bodyPr>
+          <a:lstStyle/>
+          <a:p>
+            <a:pPr algn="ctr"/>
+            <a:r>
+              <a:rPr lang="fr-FR" sz="900">
+                <a:solidFill>
+                  <a:srgbClr val="B4B4B4"/>
+                </a:solidFill>
+              </a:rPr>
+              <a:t>(c) titi_23 - mediateur-numerique.github.io - Reproduction interdite sans autorisation</a:t>
+            </a:r>
+          </a:p>
+        </p:txBody>
+      </p:sp>
     </p:spTree>
   </p:cSld>
   <p:clrMapOvr>
@@ -13875,6 +13955,46 @@
           </a:p>
         </p:txBody>
       </p:sp>
+      <p:sp>
+        <p:nvSpPr>
+          <p:cNvPr id="29" name="ZoneTexte 28">
+            <a:extLst>
+              <a:ext uri="{FF2B5EF4-FFF2-40B4-BE49-F238E27FC236}">
+                <a16:creationId xmlns:a16="http://schemas.microsoft.com/office/drawing/2014/main" id="{C3F5AEFB-960B-2FBA-A67D-36BFAEC96128}"/>
+              </a:ext>
+            </a:extLst>
+          </p:cNvPr>
+          <p:cNvSpPr txBox="1"/>
+          <p:nvPr/>
+        </p:nvSpPr>
+        <p:spPr>
+          <a:xfrm>
+            <a:off x="0" y="4864100"/>
+            <a:ext cx="9144000" cy="230832"/>
+          </a:xfrm>
+          <a:prstGeom prst="rect">
+            <a:avLst/>
+          </a:prstGeom>
+          <a:noFill/>
+        </p:spPr>
+        <p:txBody>
+          <a:bodyPr vert="horz" rtlCol="0">
+            <a:spAutoFit/>
+          </a:bodyPr>
+          <a:lstStyle/>
+          <a:p>
+            <a:pPr algn="ctr"/>
+            <a:r>
+              <a:rPr lang="fr-FR" sz="900">
+                <a:solidFill>
+                  <a:srgbClr val="B4B4B4"/>
+                </a:solidFill>
+              </a:rPr>
+              <a:t>(c) titi_23 - mediateur-numerique.github.io - Reproduction interdite sans autorisation</a:t>
+            </a:r>
+          </a:p>
+        </p:txBody>
+      </p:sp>
     </p:spTree>
   </p:cSld>
   <p:clrMapOvr>
@@ -15689,6 +15809,46 @@
           </a:prstGeom>
         </p:spPr>
       </p:pic>
+      <p:sp>
+        <p:nvSpPr>
+          <p:cNvPr id="44" name="ZoneTexte 43">
+            <a:extLst>
+              <a:ext uri="{FF2B5EF4-FFF2-40B4-BE49-F238E27FC236}">
+                <a16:creationId xmlns:a16="http://schemas.microsoft.com/office/drawing/2014/main" id="{83C3AE5D-A61F-48E8-4FC7-3BE9A789850E}"/>
+              </a:ext>
+            </a:extLst>
+          </p:cNvPr>
+          <p:cNvSpPr txBox="1"/>
+          <p:nvPr/>
+        </p:nvSpPr>
+        <p:spPr>
+          <a:xfrm>
+            <a:off x="0" y="4864100"/>
+            <a:ext cx="9144000" cy="230832"/>
+          </a:xfrm>
+          <a:prstGeom prst="rect">
+            <a:avLst/>
+          </a:prstGeom>
+          <a:noFill/>
+        </p:spPr>
+        <p:txBody>
+          <a:bodyPr vert="horz" rtlCol="0">
+            <a:spAutoFit/>
+          </a:bodyPr>
+          <a:lstStyle/>
+          <a:p>
+            <a:pPr algn="ctr"/>
+            <a:r>
+              <a:rPr lang="fr-FR" sz="900">
+                <a:solidFill>
+                  <a:srgbClr val="B4B4B4"/>
+                </a:solidFill>
+              </a:rPr>
+              <a:t>(c) titi_23 - mediateur-numerique.github.io - Reproduction interdite sans autorisation</a:t>
+            </a:r>
+          </a:p>
+        </p:txBody>
+      </p:sp>
     </p:spTree>
   </p:cSld>
   <p:clrMapOvr>
@@ -16531,6 +16691,46 @@
           </a:prstGeom>
         </p:spPr>
       </p:pic>
+      <p:sp>
+        <p:nvSpPr>
+          <p:cNvPr id="16" name="ZoneTexte 15">
+            <a:extLst>
+              <a:ext uri="{FF2B5EF4-FFF2-40B4-BE49-F238E27FC236}">
+                <a16:creationId xmlns:a16="http://schemas.microsoft.com/office/drawing/2014/main" id="{2E509AEC-DFB9-DE2A-B762-48ED6444B48B}"/>
+              </a:ext>
+            </a:extLst>
+          </p:cNvPr>
+          <p:cNvSpPr txBox="1"/>
+          <p:nvPr/>
+        </p:nvSpPr>
+        <p:spPr>
+          <a:xfrm>
+            <a:off x="0" y="4864100"/>
+            <a:ext cx="9144000" cy="230832"/>
+          </a:xfrm>
+          <a:prstGeom prst="rect">
+            <a:avLst/>
+          </a:prstGeom>
+          <a:noFill/>
+        </p:spPr>
+        <p:txBody>
+          <a:bodyPr vert="horz" rtlCol="0">
+            <a:spAutoFit/>
+          </a:bodyPr>
+          <a:lstStyle/>
+          <a:p>
+            <a:pPr algn="ctr"/>
+            <a:r>
+              <a:rPr lang="fr-FR" sz="900">
+                <a:solidFill>
+                  <a:srgbClr val="B4B4B4"/>
+                </a:solidFill>
+              </a:rPr>
+              <a:t>(c) titi_23 - mediateur-numerique.github.io - Reproduction interdite sans autorisation</a:t>
+            </a:r>
+          </a:p>
+        </p:txBody>
+      </p:sp>
     </p:spTree>
   </p:cSld>
   <p:clrMapOvr>
@@ -16831,6 +17031,46 @@
           </a:p>
         </p:txBody>
       </p:sp>
+      <p:sp>
+        <p:nvSpPr>
+          <p:cNvPr id="2" name="ZoneTexte 1">
+            <a:extLst>
+              <a:ext uri="{FF2B5EF4-FFF2-40B4-BE49-F238E27FC236}">
+                <a16:creationId xmlns:a16="http://schemas.microsoft.com/office/drawing/2014/main" id="{F44369E0-C3BB-282F-5041-E77BDAE85C4A}"/>
+              </a:ext>
+            </a:extLst>
+          </p:cNvPr>
+          <p:cNvSpPr txBox="1"/>
+          <p:nvPr/>
+        </p:nvSpPr>
+        <p:spPr>
+          <a:xfrm>
+            <a:off x="0" y="4864100"/>
+            <a:ext cx="9144000" cy="230832"/>
+          </a:xfrm>
+          <a:prstGeom prst="rect">
+            <a:avLst/>
+          </a:prstGeom>
+          <a:noFill/>
+        </p:spPr>
+        <p:txBody>
+          <a:bodyPr vert="horz" rtlCol="0">
+            <a:spAutoFit/>
+          </a:bodyPr>
+          <a:lstStyle/>
+          <a:p>
+            <a:pPr algn="ctr"/>
+            <a:r>
+              <a:rPr lang="fr-FR" sz="900">
+                <a:solidFill>
+                  <a:srgbClr val="B4B4B4"/>
+                </a:solidFill>
+              </a:rPr>
+              <a:t>(c) titi_23 - mediateur-numerique.github.io - Reproduction interdite sans autorisation</a:t>
+            </a:r>
+          </a:p>
+        </p:txBody>
+      </p:sp>
     </p:spTree>
   </p:cSld>
   <p:clrMapOvr>
@@ -17620,6 +17860,46 @@
           </a:prstGeom>
         </p:spPr>
       </p:pic>
+      <p:sp>
+        <p:nvSpPr>
+          <p:cNvPr id="16" name="ZoneTexte 15">
+            <a:extLst>
+              <a:ext uri="{FF2B5EF4-FFF2-40B4-BE49-F238E27FC236}">
+                <a16:creationId xmlns:a16="http://schemas.microsoft.com/office/drawing/2014/main" id="{71E22193-5D33-87B0-3C99-01E1A60D84D1}"/>
+              </a:ext>
+            </a:extLst>
+          </p:cNvPr>
+          <p:cNvSpPr txBox="1"/>
+          <p:nvPr/>
+        </p:nvSpPr>
+        <p:spPr>
+          <a:xfrm>
+            <a:off x="0" y="4864100"/>
+            <a:ext cx="9144000" cy="230832"/>
+          </a:xfrm>
+          <a:prstGeom prst="rect">
+            <a:avLst/>
+          </a:prstGeom>
+          <a:noFill/>
+        </p:spPr>
+        <p:txBody>
+          <a:bodyPr vert="horz" rtlCol="0">
+            <a:spAutoFit/>
+          </a:bodyPr>
+          <a:lstStyle/>
+          <a:p>
+            <a:pPr algn="ctr"/>
+            <a:r>
+              <a:rPr lang="fr-FR" sz="900">
+                <a:solidFill>
+                  <a:srgbClr val="B4B4B4"/>
+                </a:solidFill>
+              </a:rPr>
+              <a:t>(c) titi_23 - mediateur-numerique.github.io - Reproduction interdite sans autorisation</a:t>
+            </a:r>
+          </a:p>
+        </p:txBody>
+      </p:sp>
     </p:spTree>
   </p:cSld>
   <p:clrMapOvr>
@@ -17908,6 +18188,46 @@
           </a:p>
         </p:txBody>
       </p:sp>
+      <p:sp>
+        <p:nvSpPr>
+          <p:cNvPr id="2" name="ZoneTexte 1">
+            <a:extLst>
+              <a:ext uri="{FF2B5EF4-FFF2-40B4-BE49-F238E27FC236}">
+                <a16:creationId xmlns:a16="http://schemas.microsoft.com/office/drawing/2014/main" id="{389B1960-417E-8BE1-0C43-B5EF8BD78D33}"/>
+              </a:ext>
+            </a:extLst>
+          </p:cNvPr>
+          <p:cNvSpPr txBox="1"/>
+          <p:nvPr/>
+        </p:nvSpPr>
+        <p:spPr>
+          <a:xfrm>
+            <a:off x="0" y="4864100"/>
+            <a:ext cx="9144000" cy="230832"/>
+          </a:xfrm>
+          <a:prstGeom prst="rect">
+            <a:avLst/>
+          </a:prstGeom>
+          <a:noFill/>
+        </p:spPr>
+        <p:txBody>
+          <a:bodyPr vert="horz" rtlCol="0">
+            <a:spAutoFit/>
+          </a:bodyPr>
+          <a:lstStyle/>
+          <a:p>
+            <a:pPr algn="ctr"/>
+            <a:r>
+              <a:rPr lang="fr-FR" sz="900">
+                <a:solidFill>
+                  <a:srgbClr val="B4B4B4"/>
+                </a:solidFill>
+              </a:rPr>
+              <a:t>(c) titi_23 - mediateur-numerique.github.io - Reproduction interdite sans autorisation</a:t>
+            </a:r>
+          </a:p>
+        </p:txBody>
+      </p:sp>
     </p:spTree>
   </p:cSld>
   <p:clrMapOvr>
@@ -18674,6 +18994,46 @@
           </a:prstGeom>
         </p:spPr>
       </p:pic>
+      <p:sp>
+        <p:nvSpPr>
+          <p:cNvPr id="16" name="ZoneTexte 15">
+            <a:extLst>
+              <a:ext uri="{FF2B5EF4-FFF2-40B4-BE49-F238E27FC236}">
+                <a16:creationId xmlns:a16="http://schemas.microsoft.com/office/drawing/2014/main" id="{3EE7AF8E-10B6-FE6F-DF30-C1A8D997EFE0}"/>
+              </a:ext>
+            </a:extLst>
+          </p:cNvPr>
+          <p:cNvSpPr txBox="1"/>
+          <p:nvPr/>
+        </p:nvSpPr>
+        <p:spPr>
+          <a:xfrm>
+            <a:off x="0" y="4864100"/>
+            <a:ext cx="9144000" cy="230832"/>
+          </a:xfrm>
+          <a:prstGeom prst="rect">
+            <a:avLst/>
+          </a:prstGeom>
+          <a:noFill/>
+        </p:spPr>
+        <p:txBody>
+          <a:bodyPr vert="horz" rtlCol="0">
+            <a:spAutoFit/>
+          </a:bodyPr>
+          <a:lstStyle/>
+          <a:p>
+            <a:pPr algn="ctr"/>
+            <a:r>
+              <a:rPr lang="fr-FR" sz="900">
+                <a:solidFill>
+                  <a:srgbClr val="B4B4B4"/>
+                </a:solidFill>
+              </a:rPr>
+              <a:t>(c) titi_23 - mediateur-numerique.github.io - Reproduction interdite sans autorisation</a:t>
+            </a:r>
+          </a:p>
+        </p:txBody>
+      </p:sp>
     </p:spTree>
   </p:cSld>
   <p:clrMapOvr>
@@ -18974,6 +19334,46 @@
           </a:p>
         </p:txBody>
       </p:sp>
+      <p:sp>
+        <p:nvSpPr>
+          <p:cNvPr id="2" name="ZoneTexte 1">
+            <a:extLst>
+              <a:ext uri="{FF2B5EF4-FFF2-40B4-BE49-F238E27FC236}">
+                <a16:creationId xmlns:a16="http://schemas.microsoft.com/office/drawing/2014/main" id="{7E4BFF98-5409-FD98-6F9E-4C35A5EE037C}"/>
+              </a:ext>
+            </a:extLst>
+          </p:cNvPr>
+          <p:cNvSpPr txBox="1"/>
+          <p:nvPr/>
+        </p:nvSpPr>
+        <p:spPr>
+          <a:xfrm>
+            <a:off x="0" y="4864100"/>
+            <a:ext cx="9144000" cy="230832"/>
+          </a:xfrm>
+          <a:prstGeom prst="rect">
+            <a:avLst/>
+          </a:prstGeom>
+          <a:noFill/>
+        </p:spPr>
+        <p:txBody>
+          <a:bodyPr vert="horz" rtlCol="0">
+            <a:spAutoFit/>
+          </a:bodyPr>
+          <a:lstStyle/>
+          <a:p>
+            <a:pPr algn="ctr"/>
+            <a:r>
+              <a:rPr lang="fr-FR" sz="900">
+                <a:solidFill>
+                  <a:srgbClr val="B4B4B4"/>
+                </a:solidFill>
+              </a:rPr>
+              <a:t>(c) titi_23 - mediateur-numerique.github.io - Reproduction interdite sans autorisation</a:t>
+            </a:r>
+          </a:p>
+        </p:txBody>
+      </p:sp>
     </p:spTree>
   </p:cSld>
   <p:clrMapOvr>
@@ -19740,6 +20140,46 @@
           </a:prstGeom>
         </p:spPr>
       </p:pic>
+      <p:sp>
+        <p:nvSpPr>
+          <p:cNvPr id="16" name="ZoneTexte 15">
+            <a:extLst>
+              <a:ext uri="{FF2B5EF4-FFF2-40B4-BE49-F238E27FC236}">
+                <a16:creationId xmlns:a16="http://schemas.microsoft.com/office/drawing/2014/main" id="{B161FF6F-5788-9B9A-8E38-460D5C7DAAAF}"/>
+              </a:ext>
+            </a:extLst>
+          </p:cNvPr>
+          <p:cNvSpPr txBox="1"/>
+          <p:nvPr/>
+        </p:nvSpPr>
+        <p:spPr>
+          <a:xfrm>
+            <a:off x="0" y="4864100"/>
+            <a:ext cx="9144000" cy="230832"/>
+          </a:xfrm>
+          <a:prstGeom prst="rect">
+            <a:avLst/>
+          </a:prstGeom>
+          <a:noFill/>
+        </p:spPr>
+        <p:txBody>
+          <a:bodyPr vert="horz" rtlCol="0">
+            <a:spAutoFit/>
+          </a:bodyPr>
+          <a:lstStyle/>
+          <a:p>
+            <a:pPr algn="ctr"/>
+            <a:r>
+              <a:rPr lang="fr-FR" sz="900">
+                <a:solidFill>
+                  <a:srgbClr val="B4B4B4"/>
+                </a:solidFill>
+              </a:rPr>
+              <a:t>(c) titi_23 - mediateur-numerique.github.io - Reproduction interdite sans autorisation</a:t>
+            </a:r>
+          </a:p>
+        </p:txBody>
+      </p:sp>
     </p:spTree>
   </p:cSld>
   <p:clrMapOvr>
@@ -20724,6 +21164,46 @@
           </a:prstGeom>
         </p:spPr>
       </p:pic>
+      <p:sp>
+        <p:nvSpPr>
+          <p:cNvPr id="21" name="ZoneTexte 20">
+            <a:extLst>
+              <a:ext uri="{FF2B5EF4-FFF2-40B4-BE49-F238E27FC236}">
+                <a16:creationId xmlns:a16="http://schemas.microsoft.com/office/drawing/2014/main" id="{EAE79906-5D58-CE2C-5BC9-8930D6458241}"/>
+              </a:ext>
+            </a:extLst>
+          </p:cNvPr>
+          <p:cNvSpPr txBox="1"/>
+          <p:nvPr/>
+        </p:nvSpPr>
+        <p:spPr>
+          <a:xfrm>
+            <a:off x="0" y="4864100"/>
+            <a:ext cx="9144000" cy="230832"/>
+          </a:xfrm>
+          <a:prstGeom prst="rect">
+            <a:avLst/>
+          </a:prstGeom>
+          <a:noFill/>
+        </p:spPr>
+        <p:txBody>
+          <a:bodyPr vert="horz" rtlCol="0">
+            <a:spAutoFit/>
+          </a:bodyPr>
+          <a:lstStyle/>
+          <a:p>
+            <a:pPr algn="ctr"/>
+            <a:r>
+              <a:rPr lang="fr-FR" sz="900">
+                <a:solidFill>
+                  <a:srgbClr val="B4B4B4"/>
+                </a:solidFill>
+              </a:rPr>
+              <a:t>(c) titi_23 - mediateur-numerique.github.io - Reproduction interdite sans autorisation</a:t>
+            </a:r>
+          </a:p>
+        </p:txBody>
+      </p:sp>
     </p:spTree>
   </p:cSld>
   <p:clrMapOvr>
@@ -21097,6 +21577,46 @@
           </a:p>
         </p:txBody>
       </p:sp>
+      <p:sp>
+        <p:nvSpPr>
+          <p:cNvPr id="2" name="ZoneTexte 1">
+            <a:extLst>
+              <a:ext uri="{FF2B5EF4-FFF2-40B4-BE49-F238E27FC236}">
+                <a16:creationId xmlns:a16="http://schemas.microsoft.com/office/drawing/2014/main" id="{A27EF94D-2029-8EC1-5FDE-6E2267EDE1A0}"/>
+              </a:ext>
+            </a:extLst>
+          </p:cNvPr>
+          <p:cNvSpPr txBox="1"/>
+          <p:nvPr/>
+        </p:nvSpPr>
+        <p:spPr>
+          <a:xfrm>
+            <a:off x="0" y="4864100"/>
+            <a:ext cx="9144000" cy="230832"/>
+          </a:xfrm>
+          <a:prstGeom prst="rect">
+            <a:avLst/>
+          </a:prstGeom>
+          <a:noFill/>
+        </p:spPr>
+        <p:txBody>
+          <a:bodyPr vert="horz" rtlCol="0">
+            <a:spAutoFit/>
+          </a:bodyPr>
+          <a:lstStyle/>
+          <a:p>
+            <a:pPr algn="ctr"/>
+            <a:r>
+              <a:rPr lang="fr-FR" sz="900">
+                <a:solidFill>
+                  <a:srgbClr val="B4B4B4"/>
+                </a:solidFill>
+              </a:rPr>
+              <a:t>(c) titi_23 - mediateur-numerique.github.io - Reproduction interdite sans autorisation</a:t>
+            </a:r>
+          </a:p>
+        </p:txBody>
+      </p:sp>
     </p:spTree>
   </p:cSld>
   <p:clrMapOvr>
@@ -21863,6 +22383,46 @@
           </a:prstGeom>
         </p:spPr>
       </p:pic>
+      <p:sp>
+        <p:nvSpPr>
+          <p:cNvPr id="16" name="ZoneTexte 15">
+            <a:extLst>
+              <a:ext uri="{FF2B5EF4-FFF2-40B4-BE49-F238E27FC236}">
+                <a16:creationId xmlns:a16="http://schemas.microsoft.com/office/drawing/2014/main" id="{43B15132-7C31-5BA9-6C2D-0272E301D5A6}"/>
+              </a:ext>
+            </a:extLst>
+          </p:cNvPr>
+          <p:cNvSpPr txBox="1"/>
+          <p:nvPr/>
+        </p:nvSpPr>
+        <p:spPr>
+          <a:xfrm>
+            <a:off x="0" y="4864100"/>
+            <a:ext cx="9144000" cy="230832"/>
+          </a:xfrm>
+          <a:prstGeom prst="rect">
+            <a:avLst/>
+          </a:prstGeom>
+          <a:noFill/>
+        </p:spPr>
+        <p:txBody>
+          <a:bodyPr vert="horz" rtlCol="0">
+            <a:spAutoFit/>
+          </a:bodyPr>
+          <a:lstStyle/>
+          <a:p>
+            <a:pPr algn="ctr"/>
+            <a:r>
+              <a:rPr lang="fr-FR" sz="900">
+                <a:solidFill>
+                  <a:srgbClr val="B4B4B4"/>
+                </a:solidFill>
+              </a:rPr>
+              <a:t>(c) titi_23 - mediateur-numerique.github.io - Reproduction interdite sans autorisation</a:t>
+            </a:r>
+          </a:p>
+        </p:txBody>
+      </p:sp>
     </p:spTree>
   </p:cSld>
   <p:clrMapOvr>
@@ -22151,6 +22711,46 @@
           </a:p>
         </p:txBody>
       </p:sp>
+      <p:sp>
+        <p:nvSpPr>
+          <p:cNvPr id="2" name="ZoneTexte 1">
+            <a:extLst>
+              <a:ext uri="{FF2B5EF4-FFF2-40B4-BE49-F238E27FC236}">
+                <a16:creationId xmlns:a16="http://schemas.microsoft.com/office/drawing/2014/main" id="{C7E2331F-AB98-4E88-2273-A5AD4EBEEE11}"/>
+              </a:ext>
+            </a:extLst>
+          </p:cNvPr>
+          <p:cNvSpPr txBox="1"/>
+          <p:nvPr/>
+        </p:nvSpPr>
+        <p:spPr>
+          <a:xfrm>
+            <a:off x="0" y="4864100"/>
+            <a:ext cx="9144000" cy="230832"/>
+          </a:xfrm>
+          <a:prstGeom prst="rect">
+            <a:avLst/>
+          </a:prstGeom>
+          <a:noFill/>
+        </p:spPr>
+        <p:txBody>
+          <a:bodyPr vert="horz" rtlCol="0">
+            <a:spAutoFit/>
+          </a:bodyPr>
+          <a:lstStyle/>
+          <a:p>
+            <a:pPr algn="ctr"/>
+            <a:r>
+              <a:rPr lang="fr-FR" sz="900">
+                <a:solidFill>
+                  <a:srgbClr val="B4B4B4"/>
+                </a:solidFill>
+              </a:rPr>
+              <a:t>(c) titi_23 - mediateur-numerique.github.io - Reproduction interdite sans autorisation</a:t>
+            </a:r>
+          </a:p>
+        </p:txBody>
+      </p:sp>
     </p:spTree>
   </p:cSld>
   <p:clrMapOvr>
@@ -23737,6 +24337,46 @@
           </a:prstGeom>
         </p:spPr>
       </p:pic>
+      <p:sp>
+        <p:nvSpPr>
+          <p:cNvPr id="37" name="ZoneTexte 36">
+            <a:extLst>
+              <a:ext uri="{FF2B5EF4-FFF2-40B4-BE49-F238E27FC236}">
+                <a16:creationId xmlns:a16="http://schemas.microsoft.com/office/drawing/2014/main" id="{61B429B3-AF42-C896-ECE8-9599B83CC975}"/>
+              </a:ext>
+            </a:extLst>
+          </p:cNvPr>
+          <p:cNvSpPr txBox="1"/>
+          <p:nvPr/>
+        </p:nvSpPr>
+        <p:spPr>
+          <a:xfrm>
+            <a:off x="0" y="4864100"/>
+            <a:ext cx="9144000" cy="230832"/>
+          </a:xfrm>
+          <a:prstGeom prst="rect">
+            <a:avLst/>
+          </a:prstGeom>
+          <a:noFill/>
+        </p:spPr>
+        <p:txBody>
+          <a:bodyPr vert="horz" rtlCol="0">
+            <a:spAutoFit/>
+          </a:bodyPr>
+          <a:lstStyle/>
+          <a:p>
+            <a:pPr algn="ctr"/>
+            <a:r>
+              <a:rPr lang="fr-FR" sz="900">
+                <a:solidFill>
+                  <a:srgbClr val="B4B4B4"/>
+                </a:solidFill>
+              </a:rPr>
+              <a:t>(c) titi_23 - mediateur-numerique.github.io - Reproduction interdite sans autorisation</a:t>
+            </a:r>
+          </a:p>
+        </p:txBody>
+      </p:sp>
     </p:spTree>
   </p:cSld>
   <p:clrMapOvr>
@@ -25179,6 +25819,46 @@
           </a:prstGeom>
         </p:spPr>
       </p:pic>
+      <p:sp>
+        <p:nvSpPr>
+          <p:cNvPr id="38" name="ZoneTexte 37">
+            <a:extLst>
+              <a:ext uri="{FF2B5EF4-FFF2-40B4-BE49-F238E27FC236}">
+                <a16:creationId xmlns:a16="http://schemas.microsoft.com/office/drawing/2014/main" id="{09090F0E-8751-366F-ED61-F77F81CF3B54}"/>
+              </a:ext>
+            </a:extLst>
+          </p:cNvPr>
+          <p:cNvSpPr txBox="1"/>
+          <p:nvPr/>
+        </p:nvSpPr>
+        <p:spPr>
+          <a:xfrm>
+            <a:off x="0" y="4864100"/>
+            <a:ext cx="9144000" cy="230832"/>
+          </a:xfrm>
+          <a:prstGeom prst="rect">
+            <a:avLst/>
+          </a:prstGeom>
+          <a:noFill/>
+        </p:spPr>
+        <p:txBody>
+          <a:bodyPr vert="horz" rtlCol="0">
+            <a:spAutoFit/>
+          </a:bodyPr>
+          <a:lstStyle/>
+          <a:p>
+            <a:pPr algn="ctr"/>
+            <a:r>
+              <a:rPr lang="fr-FR" sz="900">
+                <a:solidFill>
+                  <a:srgbClr val="B4B4B4"/>
+                </a:solidFill>
+              </a:rPr>
+              <a:t>(c) titi_23 - mediateur-numerique.github.io - Reproduction interdite sans autorisation</a:t>
+            </a:r>
+          </a:p>
+        </p:txBody>
+      </p:sp>
     </p:spTree>
   </p:cSld>
   <p:clrMapOvr>
@@ -27916,6 +28596,46 @@
           </a:prstGeom>
         </p:spPr>
       </p:pic>
+      <p:sp>
+        <p:nvSpPr>
+          <p:cNvPr id="70" name="ZoneTexte 69">
+            <a:extLst>
+              <a:ext uri="{FF2B5EF4-FFF2-40B4-BE49-F238E27FC236}">
+                <a16:creationId xmlns:a16="http://schemas.microsoft.com/office/drawing/2014/main" id="{F9F5A856-0653-A404-EB7A-3CE514FBF449}"/>
+              </a:ext>
+            </a:extLst>
+          </p:cNvPr>
+          <p:cNvSpPr txBox="1"/>
+          <p:nvPr/>
+        </p:nvSpPr>
+        <p:spPr>
+          <a:xfrm>
+            <a:off x="0" y="4864100"/>
+            <a:ext cx="9144000" cy="230832"/>
+          </a:xfrm>
+          <a:prstGeom prst="rect">
+            <a:avLst/>
+          </a:prstGeom>
+          <a:noFill/>
+        </p:spPr>
+        <p:txBody>
+          <a:bodyPr vert="horz" rtlCol="0">
+            <a:spAutoFit/>
+          </a:bodyPr>
+          <a:lstStyle/>
+          <a:p>
+            <a:pPr algn="ctr"/>
+            <a:r>
+              <a:rPr lang="fr-FR" sz="900">
+                <a:solidFill>
+                  <a:srgbClr val="B4B4B4"/>
+                </a:solidFill>
+              </a:rPr>
+              <a:t>(c) titi_23 - mediateur-numerique.github.io - Reproduction interdite sans autorisation</a:t>
+            </a:r>
+          </a:p>
+        </p:txBody>
+      </p:sp>
     </p:spTree>
   </p:cSld>
   <p:clrMapOvr>
@@ -28693,6 +29413,46 @@
           </a:prstGeom>
         </p:spPr>
       </p:pic>
+      <p:sp>
+        <p:nvSpPr>
+          <p:cNvPr id="21" name="ZoneTexte 20">
+            <a:extLst>
+              <a:ext uri="{FF2B5EF4-FFF2-40B4-BE49-F238E27FC236}">
+                <a16:creationId xmlns:a16="http://schemas.microsoft.com/office/drawing/2014/main" id="{657EE9A8-9B48-6026-08A6-23A6F46048E7}"/>
+              </a:ext>
+            </a:extLst>
+          </p:cNvPr>
+          <p:cNvSpPr txBox="1"/>
+          <p:nvPr/>
+        </p:nvSpPr>
+        <p:spPr>
+          <a:xfrm>
+            <a:off x="0" y="4864100"/>
+            <a:ext cx="9144000" cy="230832"/>
+          </a:xfrm>
+          <a:prstGeom prst="rect">
+            <a:avLst/>
+          </a:prstGeom>
+          <a:noFill/>
+        </p:spPr>
+        <p:txBody>
+          <a:bodyPr vert="horz" rtlCol="0">
+            <a:spAutoFit/>
+          </a:bodyPr>
+          <a:lstStyle/>
+          <a:p>
+            <a:pPr algn="ctr"/>
+            <a:r>
+              <a:rPr lang="fr-FR" sz="900">
+                <a:solidFill>
+                  <a:srgbClr val="B4B4B4"/>
+                </a:solidFill>
+              </a:rPr>
+              <a:t>(c) titi_23 - mediateur-numerique.github.io - Reproduction interdite sans autorisation</a:t>
+            </a:r>
+          </a:p>
+        </p:txBody>
+      </p:sp>
     </p:spTree>
   </p:cSld>
   <p:clrMapOvr>
@@ -29272,6 +30032,46 @@
           </a:p>
         </p:txBody>
       </p:sp>
+      <p:sp>
+        <p:nvSpPr>
+          <p:cNvPr id="2" name="ZoneTexte 1">
+            <a:extLst>
+              <a:ext uri="{FF2B5EF4-FFF2-40B4-BE49-F238E27FC236}">
+                <a16:creationId xmlns:a16="http://schemas.microsoft.com/office/drawing/2014/main" id="{880BCF48-9C13-40A4-4A13-429D5A371AF7}"/>
+              </a:ext>
+            </a:extLst>
+          </p:cNvPr>
+          <p:cNvSpPr txBox="1"/>
+          <p:nvPr/>
+        </p:nvSpPr>
+        <p:spPr>
+          <a:xfrm>
+            <a:off x="0" y="4864100"/>
+            <a:ext cx="9144000" cy="230832"/>
+          </a:xfrm>
+          <a:prstGeom prst="rect">
+            <a:avLst/>
+          </a:prstGeom>
+          <a:noFill/>
+        </p:spPr>
+        <p:txBody>
+          <a:bodyPr vert="horz" rtlCol="0">
+            <a:spAutoFit/>
+          </a:bodyPr>
+          <a:lstStyle/>
+          <a:p>
+            <a:pPr algn="ctr"/>
+            <a:r>
+              <a:rPr lang="fr-FR" sz="900">
+                <a:solidFill>
+                  <a:srgbClr val="B4B4B4"/>
+                </a:solidFill>
+              </a:rPr>
+              <a:t>(c) titi_23 - mediateur-numerique.github.io - Reproduction interdite sans autorisation</a:t>
+            </a:r>
+          </a:p>
+        </p:txBody>
+      </p:sp>
     </p:spTree>
   </p:cSld>
   <p:clrMapOvr>
@@ -30104,6 +30904,46 @@
           </a:p>
         </p:txBody>
       </p:sp>
+      <p:sp>
+        <p:nvSpPr>
+          <p:cNvPr id="5" name="ZoneTexte 4">
+            <a:extLst>
+              <a:ext uri="{FF2B5EF4-FFF2-40B4-BE49-F238E27FC236}">
+                <a16:creationId xmlns:a16="http://schemas.microsoft.com/office/drawing/2014/main" id="{3A9055ED-F9F9-C262-258C-C0E9C417B52B}"/>
+              </a:ext>
+            </a:extLst>
+          </p:cNvPr>
+          <p:cNvSpPr txBox="1"/>
+          <p:nvPr/>
+        </p:nvSpPr>
+        <p:spPr>
+          <a:xfrm>
+            <a:off x="0" y="4864100"/>
+            <a:ext cx="9144000" cy="230832"/>
+          </a:xfrm>
+          <a:prstGeom prst="rect">
+            <a:avLst/>
+          </a:prstGeom>
+          <a:noFill/>
+        </p:spPr>
+        <p:txBody>
+          <a:bodyPr vert="horz" rtlCol="0">
+            <a:spAutoFit/>
+          </a:bodyPr>
+          <a:lstStyle/>
+          <a:p>
+            <a:pPr algn="ctr"/>
+            <a:r>
+              <a:rPr lang="fr-FR" sz="900">
+                <a:solidFill>
+                  <a:srgbClr val="B4B4B4"/>
+                </a:solidFill>
+              </a:rPr>
+              <a:t>(c) titi_23 - mediateur-numerique.github.io - Reproduction interdite sans autorisation</a:t>
+            </a:r>
+          </a:p>
+        </p:txBody>
+      </p:sp>
     </p:spTree>
   </p:cSld>
   <p:clrMapOvr>
@@ -31004,6 +31844,46 @@
           </a:prstGeom>
         </p:spPr>
       </p:pic>
+      <p:sp>
+        <p:nvSpPr>
+          <p:cNvPr id="25" name="ZoneTexte 24">
+            <a:extLst>
+              <a:ext uri="{FF2B5EF4-FFF2-40B4-BE49-F238E27FC236}">
+                <a16:creationId xmlns:a16="http://schemas.microsoft.com/office/drawing/2014/main" id="{C9764971-BE3B-7D20-6EA8-FD4C61A59101}"/>
+              </a:ext>
+            </a:extLst>
+          </p:cNvPr>
+          <p:cNvSpPr txBox="1"/>
+          <p:nvPr/>
+        </p:nvSpPr>
+        <p:spPr>
+          <a:xfrm>
+            <a:off x="0" y="4864100"/>
+            <a:ext cx="9144000" cy="230832"/>
+          </a:xfrm>
+          <a:prstGeom prst="rect">
+            <a:avLst/>
+          </a:prstGeom>
+          <a:noFill/>
+        </p:spPr>
+        <p:txBody>
+          <a:bodyPr vert="horz" rtlCol="0">
+            <a:spAutoFit/>
+          </a:bodyPr>
+          <a:lstStyle/>
+          <a:p>
+            <a:pPr algn="ctr"/>
+            <a:r>
+              <a:rPr lang="fr-FR" sz="900">
+                <a:solidFill>
+                  <a:srgbClr val="B4B4B4"/>
+                </a:solidFill>
+              </a:rPr>
+              <a:t>(c) titi_23 - mediateur-numerique.github.io - Reproduction interdite sans autorisation</a:t>
+            </a:r>
+          </a:p>
+        </p:txBody>
+      </p:sp>
     </p:spTree>
   </p:cSld>
   <p:clrMapOvr>
@@ -32144,6 +33024,46 @@
           </a:p>
         </p:txBody>
       </p:sp>
+      <p:sp>
+        <p:nvSpPr>
+          <p:cNvPr id="2" name="ZoneTexte 1">
+            <a:extLst>
+              <a:ext uri="{FF2B5EF4-FFF2-40B4-BE49-F238E27FC236}">
+                <a16:creationId xmlns:a16="http://schemas.microsoft.com/office/drawing/2014/main" id="{D2677F51-59CC-C997-EA9E-091D181AC91D}"/>
+              </a:ext>
+            </a:extLst>
+          </p:cNvPr>
+          <p:cNvSpPr txBox="1"/>
+          <p:nvPr/>
+        </p:nvSpPr>
+        <p:spPr>
+          <a:xfrm>
+            <a:off x="0" y="4864100"/>
+            <a:ext cx="9144000" cy="230832"/>
+          </a:xfrm>
+          <a:prstGeom prst="rect">
+            <a:avLst/>
+          </a:prstGeom>
+          <a:noFill/>
+        </p:spPr>
+        <p:txBody>
+          <a:bodyPr vert="horz" rtlCol="0">
+            <a:spAutoFit/>
+          </a:bodyPr>
+          <a:lstStyle/>
+          <a:p>
+            <a:pPr algn="ctr"/>
+            <a:r>
+              <a:rPr lang="fr-FR" sz="900">
+                <a:solidFill>
+                  <a:srgbClr val="B4B4B4"/>
+                </a:solidFill>
+              </a:rPr>
+              <a:t>(c) titi_23 - mediateur-numerique.github.io - Reproduction interdite sans autorisation</a:t>
+            </a:r>
+          </a:p>
+        </p:txBody>
+      </p:sp>
     </p:spTree>
   </p:cSld>
   <p:clrMapOvr>
@@ -33392,6 +34312,46 @@
           </a:prstGeom>
         </p:spPr>
       </p:pic>
+      <p:sp>
+        <p:nvSpPr>
+          <p:cNvPr id="30" name="ZoneTexte 29">
+            <a:extLst>
+              <a:ext uri="{FF2B5EF4-FFF2-40B4-BE49-F238E27FC236}">
+                <a16:creationId xmlns:a16="http://schemas.microsoft.com/office/drawing/2014/main" id="{29FE3E45-1884-CB5E-6703-58D5CA98C5A2}"/>
+              </a:ext>
+            </a:extLst>
+          </p:cNvPr>
+          <p:cNvSpPr txBox="1"/>
+          <p:nvPr/>
+        </p:nvSpPr>
+        <p:spPr>
+          <a:xfrm>
+            <a:off x="0" y="4864100"/>
+            <a:ext cx="9144000" cy="230832"/>
+          </a:xfrm>
+          <a:prstGeom prst="rect">
+            <a:avLst/>
+          </a:prstGeom>
+          <a:noFill/>
+        </p:spPr>
+        <p:txBody>
+          <a:bodyPr vert="horz" rtlCol="0">
+            <a:spAutoFit/>
+          </a:bodyPr>
+          <a:lstStyle/>
+          <a:p>
+            <a:pPr algn="ctr"/>
+            <a:r>
+              <a:rPr lang="fr-FR" sz="900">
+                <a:solidFill>
+                  <a:srgbClr val="B4B4B4"/>
+                </a:solidFill>
+              </a:rPr>
+              <a:t>(c) titi_23 - mediateur-numerique.github.io - Reproduction interdite sans autorisation</a:t>
+            </a:r>
+          </a:p>
+        </p:txBody>
+      </p:sp>
     </p:spTree>
   </p:cSld>
   <p:clrMapOvr>
@@ -34081,6 +35041,46 @@
           </a:p>
         </p:txBody>
       </p:sp>
+      <p:sp>
+        <p:nvSpPr>
+          <p:cNvPr id="6" name="ZoneTexte 5">
+            <a:extLst>
+              <a:ext uri="{FF2B5EF4-FFF2-40B4-BE49-F238E27FC236}">
+                <a16:creationId xmlns:a16="http://schemas.microsoft.com/office/drawing/2014/main" id="{85486E65-5D21-ACC7-E3AB-EAF2EDC16661}"/>
+              </a:ext>
+            </a:extLst>
+          </p:cNvPr>
+          <p:cNvSpPr txBox="1"/>
+          <p:nvPr/>
+        </p:nvSpPr>
+        <p:spPr>
+          <a:xfrm>
+            <a:off x="0" y="4864100"/>
+            <a:ext cx="9144000" cy="230832"/>
+          </a:xfrm>
+          <a:prstGeom prst="rect">
+            <a:avLst/>
+          </a:prstGeom>
+          <a:noFill/>
+        </p:spPr>
+        <p:txBody>
+          <a:bodyPr vert="horz" rtlCol="0">
+            <a:spAutoFit/>
+          </a:bodyPr>
+          <a:lstStyle/>
+          <a:p>
+            <a:pPr algn="ctr"/>
+            <a:r>
+              <a:rPr lang="fr-FR" sz="900">
+                <a:solidFill>
+                  <a:srgbClr val="B4B4B4"/>
+                </a:solidFill>
+              </a:rPr>
+              <a:t>(c) titi_23 - mediateur-numerique.github.io - Reproduction interdite sans autorisation</a:t>
+            </a:r>
+          </a:p>
+        </p:txBody>
+      </p:sp>
     </p:spTree>
   </p:cSld>
   <p:clrMapOvr>
@@ -35447,6 +36447,46 @@
           </a:prstGeom>
         </p:spPr>
       </p:pic>
+      <p:sp>
+        <p:nvSpPr>
+          <p:cNvPr id="38" name="ZoneTexte 37">
+            <a:extLst>
+              <a:ext uri="{FF2B5EF4-FFF2-40B4-BE49-F238E27FC236}">
+                <a16:creationId xmlns:a16="http://schemas.microsoft.com/office/drawing/2014/main" id="{F9AE4151-85DC-F82D-F1AF-4A211209FC9E}"/>
+              </a:ext>
+            </a:extLst>
+          </p:cNvPr>
+          <p:cNvSpPr txBox="1"/>
+          <p:nvPr/>
+        </p:nvSpPr>
+        <p:spPr>
+          <a:xfrm>
+            <a:off x="0" y="4864100"/>
+            <a:ext cx="9144000" cy="230832"/>
+          </a:xfrm>
+          <a:prstGeom prst="rect">
+            <a:avLst/>
+          </a:prstGeom>
+          <a:noFill/>
+        </p:spPr>
+        <p:txBody>
+          <a:bodyPr vert="horz" rtlCol="0">
+            <a:spAutoFit/>
+          </a:bodyPr>
+          <a:lstStyle/>
+          <a:p>
+            <a:pPr algn="ctr"/>
+            <a:r>
+              <a:rPr lang="fr-FR" sz="900">
+                <a:solidFill>
+                  <a:srgbClr val="B4B4B4"/>
+                </a:solidFill>
+              </a:rPr>
+              <a:t>(c) titi_23 - mediateur-numerique.github.io - Reproduction interdite sans autorisation</a:t>
+            </a:r>
+          </a:p>
+        </p:txBody>
+      </p:sp>
     </p:spTree>
   </p:cSld>
   <p:clrMapOvr>
@@ -35943,6 +36983,46 @@
           </a:p>
         </p:txBody>
       </p:sp>
+      <p:sp>
+        <p:nvSpPr>
+          <p:cNvPr id="8" name="ZoneTexte 7">
+            <a:extLst>
+              <a:ext uri="{FF2B5EF4-FFF2-40B4-BE49-F238E27FC236}">
+                <a16:creationId xmlns:a16="http://schemas.microsoft.com/office/drawing/2014/main" id="{5C9AE51A-750B-E2F9-E114-26C0C6B4FA6F}"/>
+              </a:ext>
+            </a:extLst>
+          </p:cNvPr>
+          <p:cNvSpPr txBox="1"/>
+          <p:nvPr/>
+        </p:nvSpPr>
+        <p:spPr>
+          <a:xfrm>
+            <a:off x="0" y="4864100"/>
+            <a:ext cx="9144000" cy="230832"/>
+          </a:xfrm>
+          <a:prstGeom prst="rect">
+            <a:avLst/>
+          </a:prstGeom>
+          <a:noFill/>
+        </p:spPr>
+        <p:txBody>
+          <a:bodyPr vert="horz" rtlCol="0">
+            <a:spAutoFit/>
+          </a:bodyPr>
+          <a:lstStyle/>
+          <a:p>
+            <a:pPr algn="ctr"/>
+            <a:r>
+              <a:rPr lang="fr-FR" sz="900">
+                <a:solidFill>
+                  <a:srgbClr val="B4B4B4"/>
+                </a:solidFill>
+              </a:rPr>
+              <a:t>(c) titi_23 - mediateur-numerique.github.io - Reproduction interdite sans autorisation</a:t>
+            </a:r>
+          </a:p>
+        </p:txBody>
+      </p:sp>
     </p:spTree>
   </p:cSld>
   <p:clrMapOvr>
@@ -36194,6 +37274,46 @@
           </a:p>
         </p:txBody>
       </p:sp>
+      <p:sp>
+        <p:nvSpPr>
+          <p:cNvPr id="2" name="ZoneTexte 1">
+            <a:extLst>
+              <a:ext uri="{FF2B5EF4-FFF2-40B4-BE49-F238E27FC236}">
+                <a16:creationId xmlns:a16="http://schemas.microsoft.com/office/drawing/2014/main" id="{BB0CB01F-BB2F-68FB-150D-D693CFFD8AE0}"/>
+              </a:ext>
+            </a:extLst>
+          </p:cNvPr>
+          <p:cNvSpPr txBox="1"/>
+          <p:nvPr/>
+        </p:nvSpPr>
+        <p:spPr>
+          <a:xfrm>
+            <a:off x="0" y="4864100"/>
+            <a:ext cx="9144000" cy="230832"/>
+          </a:xfrm>
+          <a:prstGeom prst="rect">
+            <a:avLst/>
+          </a:prstGeom>
+          <a:noFill/>
+        </p:spPr>
+        <p:txBody>
+          <a:bodyPr vert="horz" rtlCol="0">
+            <a:spAutoFit/>
+          </a:bodyPr>
+          <a:lstStyle/>
+          <a:p>
+            <a:pPr algn="ctr"/>
+            <a:r>
+              <a:rPr lang="fr-FR" sz="900">
+                <a:solidFill>
+                  <a:srgbClr val="B4B4B4"/>
+                </a:solidFill>
+              </a:rPr>
+              <a:t>(c) titi_23 - mediateur-numerique.github.io - Reproduction interdite sans autorisation</a:t>
+            </a:r>
+          </a:p>
+        </p:txBody>
+      </p:sp>
     </p:spTree>
   </p:cSld>
   <p:clrMapOvr>
@@ -37214,6 +38334,46 @@
           </a:prstGeom>
         </p:spPr>
       </p:pic>
+      <p:sp>
+        <p:nvSpPr>
+          <p:cNvPr id="27" name="ZoneTexte 26">
+            <a:extLst>
+              <a:ext uri="{FF2B5EF4-FFF2-40B4-BE49-F238E27FC236}">
+                <a16:creationId xmlns:a16="http://schemas.microsoft.com/office/drawing/2014/main" id="{30E57E9A-07F7-E6C8-43F0-1E8CE1176C17}"/>
+              </a:ext>
+            </a:extLst>
+          </p:cNvPr>
+          <p:cNvSpPr txBox="1"/>
+          <p:nvPr/>
+        </p:nvSpPr>
+        <p:spPr>
+          <a:xfrm>
+            <a:off x="0" y="4864100"/>
+            <a:ext cx="9144000" cy="230832"/>
+          </a:xfrm>
+          <a:prstGeom prst="rect">
+            <a:avLst/>
+          </a:prstGeom>
+          <a:noFill/>
+        </p:spPr>
+        <p:txBody>
+          <a:bodyPr vert="horz" rtlCol="0">
+            <a:spAutoFit/>
+          </a:bodyPr>
+          <a:lstStyle/>
+          <a:p>
+            <a:pPr algn="ctr"/>
+            <a:r>
+              <a:rPr lang="fr-FR" sz="900">
+                <a:solidFill>
+                  <a:srgbClr val="B4B4B4"/>
+                </a:solidFill>
+              </a:rPr>
+              <a:t>(c) titi_23 - mediateur-numerique.github.io - Reproduction interdite sans autorisation</a:t>
+            </a:r>
+          </a:p>
+        </p:txBody>
+      </p:sp>
     </p:spTree>
   </p:cSld>
   <p:clrMapOvr>
@@ -38656,6 +39816,46 @@
           </a:prstGeom>
         </p:spPr>
       </p:pic>
+      <p:sp>
+        <p:nvSpPr>
+          <p:cNvPr id="38" name="ZoneTexte 37">
+            <a:extLst>
+              <a:ext uri="{FF2B5EF4-FFF2-40B4-BE49-F238E27FC236}">
+                <a16:creationId xmlns:a16="http://schemas.microsoft.com/office/drawing/2014/main" id="{097D6927-A865-33F9-4F67-BBE2CEF25E85}"/>
+              </a:ext>
+            </a:extLst>
+          </p:cNvPr>
+          <p:cNvSpPr txBox="1"/>
+          <p:nvPr/>
+        </p:nvSpPr>
+        <p:spPr>
+          <a:xfrm>
+            <a:off x="0" y="4864100"/>
+            <a:ext cx="9144000" cy="230832"/>
+          </a:xfrm>
+          <a:prstGeom prst="rect">
+            <a:avLst/>
+          </a:prstGeom>
+          <a:noFill/>
+        </p:spPr>
+        <p:txBody>
+          <a:bodyPr vert="horz" rtlCol="0">
+            <a:spAutoFit/>
+          </a:bodyPr>
+          <a:lstStyle/>
+          <a:p>
+            <a:pPr algn="ctr"/>
+            <a:r>
+              <a:rPr lang="fr-FR" sz="900">
+                <a:solidFill>
+                  <a:srgbClr val="B4B4B4"/>
+                </a:solidFill>
+              </a:rPr>
+              <a:t>(c) titi_23 - mediateur-numerique.github.io - Reproduction interdite sans autorisation</a:t>
+            </a:r>
+          </a:p>
+        </p:txBody>
+      </p:sp>
     </p:spTree>
   </p:cSld>
   <p:clrMapOvr>
@@ -40067,6 +41267,46 @@
           </a:prstGeom>
         </p:spPr>
       </p:pic>
+      <p:sp>
+        <p:nvSpPr>
+          <p:cNvPr id="29" name="ZoneTexte 28">
+            <a:extLst>
+              <a:ext uri="{FF2B5EF4-FFF2-40B4-BE49-F238E27FC236}">
+                <a16:creationId xmlns:a16="http://schemas.microsoft.com/office/drawing/2014/main" id="{7FD02181-CB29-3397-F6D1-3B4FBEBFC1C4}"/>
+              </a:ext>
+            </a:extLst>
+          </p:cNvPr>
+          <p:cNvSpPr txBox="1"/>
+          <p:nvPr/>
+        </p:nvSpPr>
+        <p:spPr>
+          <a:xfrm>
+            <a:off x="0" y="4864100"/>
+            <a:ext cx="9144000" cy="230832"/>
+          </a:xfrm>
+          <a:prstGeom prst="rect">
+            <a:avLst/>
+          </a:prstGeom>
+          <a:noFill/>
+        </p:spPr>
+        <p:txBody>
+          <a:bodyPr vert="horz" rtlCol="0">
+            <a:spAutoFit/>
+          </a:bodyPr>
+          <a:lstStyle/>
+          <a:p>
+            <a:pPr algn="ctr"/>
+            <a:r>
+              <a:rPr lang="fr-FR" sz="900">
+                <a:solidFill>
+                  <a:srgbClr val="B4B4B4"/>
+                </a:solidFill>
+              </a:rPr>
+              <a:t>(c) titi_23 - mediateur-numerique.github.io - Reproduction interdite sans autorisation</a:t>
+            </a:r>
+          </a:p>
+        </p:txBody>
+      </p:sp>
     </p:spTree>
   </p:cSld>
   <p:clrMapOvr>
@@ -41783,6 +43023,46 @@
           </a:prstGeom>
         </p:spPr>
       </p:pic>
+      <p:sp>
+        <p:nvSpPr>
+          <p:cNvPr id="38" name="ZoneTexte 37">
+            <a:extLst>
+              <a:ext uri="{FF2B5EF4-FFF2-40B4-BE49-F238E27FC236}">
+                <a16:creationId xmlns:a16="http://schemas.microsoft.com/office/drawing/2014/main" id="{B88584E1-F381-44EB-C674-08300B777172}"/>
+              </a:ext>
+            </a:extLst>
+          </p:cNvPr>
+          <p:cNvSpPr txBox="1"/>
+          <p:nvPr/>
+        </p:nvSpPr>
+        <p:spPr>
+          <a:xfrm>
+            <a:off x="0" y="4864100"/>
+            <a:ext cx="9144000" cy="230832"/>
+          </a:xfrm>
+          <a:prstGeom prst="rect">
+            <a:avLst/>
+          </a:prstGeom>
+          <a:noFill/>
+        </p:spPr>
+        <p:txBody>
+          <a:bodyPr vert="horz" rtlCol="0">
+            <a:spAutoFit/>
+          </a:bodyPr>
+          <a:lstStyle/>
+          <a:p>
+            <a:pPr algn="ctr"/>
+            <a:r>
+              <a:rPr lang="fr-FR" sz="900">
+                <a:solidFill>
+                  <a:srgbClr val="B4B4B4"/>
+                </a:solidFill>
+              </a:rPr>
+              <a:t>(c) titi_23 - mediateur-numerique.github.io - Reproduction interdite sans autorisation</a:t>
+            </a:r>
+          </a:p>
+        </p:txBody>
+      </p:sp>
     </p:spTree>
   </p:cSld>
   <p:clrMapOvr>
@@ -43205,6 +44485,46 @@
           </a:prstGeom>
         </p:spPr>
       </p:pic>
+      <p:sp>
+        <p:nvSpPr>
+          <p:cNvPr id="36" name="ZoneTexte 35">
+            <a:extLst>
+              <a:ext uri="{FF2B5EF4-FFF2-40B4-BE49-F238E27FC236}">
+                <a16:creationId xmlns:a16="http://schemas.microsoft.com/office/drawing/2014/main" id="{A64FC272-B58B-F6B6-9BDE-21B3E7A4EC3C}"/>
+              </a:ext>
+            </a:extLst>
+          </p:cNvPr>
+          <p:cNvSpPr txBox="1"/>
+          <p:nvPr/>
+        </p:nvSpPr>
+        <p:spPr>
+          <a:xfrm>
+            <a:off x="0" y="4864100"/>
+            <a:ext cx="9144000" cy="230832"/>
+          </a:xfrm>
+          <a:prstGeom prst="rect">
+            <a:avLst/>
+          </a:prstGeom>
+          <a:noFill/>
+        </p:spPr>
+        <p:txBody>
+          <a:bodyPr vert="horz" rtlCol="0">
+            <a:spAutoFit/>
+          </a:bodyPr>
+          <a:lstStyle/>
+          <a:p>
+            <a:pPr algn="ctr"/>
+            <a:r>
+              <a:rPr lang="fr-FR" sz="900">
+                <a:solidFill>
+                  <a:srgbClr val="B4B4B4"/>
+                </a:solidFill>
+              </a:rPr>
+              <a:t>(c) titi_23 - mediateur-numerique.github.io - Reproduction interdite sans autorisation</a:t>
+            </a:r>
+          </a:p>
+        </p:txBody>
+      </p:sp>
     </p:spTree>
   </p:cSld>
   <p:clrMapOvr>
@@ -44604,6 +45924,46 @@
           </a:prstGeom>
         </p:spPr>
       </p:pic>
+      <p:sp>
+        <p:nvSpPr>
+          <p:cNvPr id="36" name="ZoneTexte 35">
+            <a:extLst>
+              <a:ext uri="{FF2B5EF4-FFF2-40B4-BE49-F238E27FC236}">
+                <a16:creationId xmlns:a16="http://schemas.microsoft.com/office/drawing/2014/main" id="{F0A9E01A-FA2B-5E8C-B5CC-EA1E8A616205}"/>
+              </a:ext>
+            </a:extLst>
+          </p:cNvPr>
+          <p:cNvSpPr txBox="1"/>
+          <p:nvPr/>
+        </p:nvSpPr>
+        <p:spPr>
+          <a:xfrm>
+            <a:off x="0" y="4864100"/>
+            <a:ext cx="9144000" cy="230832"/>
+          </a:xfrm>
+          <a:prstGeom prst="rect">
+            <a:avLst/>
+          </a:prstGeom>
+          <a:noFill/>
+        </p:spPr>
+        <p:txBody>
+          <a:bodyPr vert="horz" rtlCol="0">
+            <a:spAutoFit/>
+          </a:bodyPr>
+          <a:lstStyle/>
+          <a:p>
+            <a:pPr algn="ctr"/>
+            <a:r>
+              <a:rPr lang="fr-FR" sz="900">
+                <a:solidFill>
+                  <a:srgbClr val="B4B4B4"/>
+                </a:solidFill>
+              </a:rPr>
+              <a:t>(c) titi_23 - mediateur-numerique.github.io - Reproduction interdite sans autorisation</a:t>
+            </a:r>
+          </a:p>
+        </p:txBody>
+      </p:sp>
     </p:spTree>
   </p:cSld>
   <p:clrMapOvr>
